--- a/resources/presentations/analytics.pptx
+++ b/resources/presentations/analytics.pptx
@@ -6,8 +6,8 @@
   </p:sldMasterIdLst>
   <p:sldIdLst>
     <p:sldId id="256" r:id="rId2"/>
-    <p:sldId id="257" r:id="rId3"/>
-    <p:sldId id="261" r:id="rId4"/>
+    <p:sldId id="261" r:id="rId3"/>
+    <p:sldId id="257" r:id="rId4"/>
     <p:sldId id="258" r:id="rId5"/>
     <p:sldId id="259" r:id="rId6"/>
     <p:sldId id="262" r:id="rId7"/>
@@ -3420,7 +3420,7 @@
           <p:cNvPr id="2" name="Заголовок 1">
             <a:extLst>
               <a:ext uri="{FF2B5EF4-FFF2-40B4-BE49-F238E27FC236}">
-                <a16:creationId xmlns:a16="http://schemas.microsoft.com/office/drawing/2014/main" id="{19DF7685-50BE-487C-8945-100C539656C3}"/>
+                <a16:creationId xmlns:a16="http://schemas.microsoft.com/office/drawing/2014/main" id="{B60440BF-BA2F-48E2-8185-A7A4AB40BDB0}"/>
               </a:ext>
             </a:extLst>
           </p:cNvPr>
@@ -3438,7 +3438,7 @@
           <a:p>
             <a:r>
               <a:rPr lang="ru-RU" dirty="0"/>
-              <a:t>Цели проекта</a:t>
+              <a:t>Ключевое сообщение для аналитиков</a:t>
             </a:r>
           </a:p>
         </p:txBody>
@@ -3448,7 +3448,7 @@
           <p:cNvPr id="3" name="Объект 2">
             <a:extLst>
               <a:ext uri="{FF2B5EF4-FFF2-40B4-BE49-F238E27FC236}">
-                <a16:creationId xmlns:a16="http://schemas.microsoft.com/office/drawing/2014/main" id="{EC799871-5810-4182-A767-80117F8C9F50}"/>
+                <a16:creationId xmlns:a16="http://schemas.microsoft.com/office/drawing/2014/main" id="{6EC53DE8-D01A-448C-BF9E-426B6ECDE19D}"/>
               </a:ext>
             </a:extLst>
           </p:cNvPr>
@@ -3464,14 +3464,51 @@
           <a:bodyPr/>
           <a:lstStyle/>
           <a:p>
-            <a:endParaRPr lang="ru-RU"/>
+            <a:r>
+              <a:rPr lang="ru-RU" b="0" i="0" dirty="0">
+                <a:effectLst/>
+                <a:latin typeface="+mj-lt"/>
+              </a:rPr>
+              <a:t>Мы успешно выявили скрытые паттерны подозрительного поведения среди частых летников, объединив разрозненные данные из внешних источников. Это позволяет </a:t>
+            </a:r>
+            <a:r>
+              <a:rPr lang="ru-RU" b="0" i="0" dirty="0" err="1">
+                <a:effectLst/>
+                <a:latin typeface="+mj-lt"/>
+              </a:rPr>
+              <a:t>Yoyoflot</a:t>
+            </a:r>
+            <a:r>
+              <a:rPr lang="ru-RU" b="0" i="0" dirty="0">
+                <a:effectLst/>
+                <a:latin typeface="+mj-lt"/>
+              </a:rPr>
+              <a:t> </a:t>
+            </a:r>
+            <a:r>
+              <a:rPr lang="ru-RU" b="0" i="0" dirty="0" err="1">
+                <a:effectLst/>
+                <a:latin typeface="+mj-lt"/>
+              </a:rPr>
+              <a:t>проактивно</a:t>
+            </a:r>
+            <a:r>
+              <a:rPr lang="ru-RU" b="0" i="0" dirty="0">
+                <a:effectLst/>
+                <a:latin typeface="+mj-lt"/>
+              </a:rPr>
+              <a:t> предотвращать угрозы государственной безопасности и защищать репутацию компании, минимизируя операционные риски при контролируемых затратах на интеграцию решения</a:t>
+            </a:r>
+            <a:endParaRPr lang="ru-RU" dirty="0">
+              <a:latin typeface="+mj-lt"/>
+            </a:endParaRPr>
           </a:p>
         </p:txBody>
       </p:sp>
     </p:spTree>
     <p:extLst>
       <p:ext uri="{BB962C8B-B14F-4D97-AF65-F5344CB8AC3E}">
-        <p14:creationId xmlns:p14="http://schemas.microsoft.com/office/powerpoint/2010/main" val="3021065281"/>
+        <p14:creationId xmlns:p14="http://schemas.microsoft.com/office/powerpoint/2010/main" val="3408965315"/>
       </p:ext>
     </p:extLst>
   </p:cSld>
@@ -3503,7 +3540,7 @@
           <p:cNvPr id="2" name="Заголовок 1">
             <a:extLst>
               <a:ext uri="{FF2B5EF4-FFF2-40B4-BE49-F238E27FC236}">
-                <a16:creationId xmlns:a16="http://schemas.microsoft.com/office/drawing/2014/main" id="{B60440BF-BA2F-48E2-8185-A7A4AB40BDB0}"/>
+                <a16:creationId xmlns:a16="http://schemas.microsoft.com/office/drawing/2014/main" id="{19DF7685-50BE-487C-8945-100C539656C3}"/>
               </a:ext>
             </a:extLst>
           </p:cNvPr>
@@ -3521,7 +3558,7 @@
           <a:p>
             <a:r>
               <a:rPr lang="ru-RU" dirty="0"/>
-              <a:t>Ключевое сообщение для аналитиков</a:t>
+              <a:t>Цели проекта</a:t>
             </a:r>
           </a:p>
         </p:txBody>
@@ -3531,7 +3568,7 @@
           <p:cNvPr id="3" name="Объект 2">
             <a:extLst>
               <a:ext uri="{FF2B5EF4-FFF2-40B4-BE49-F238E27FC236}">
-                <a16:creationId xmlns:a16="http://schemas.microsoft.com/office/drawing/2014/main" id="{6EC53DE8-D01A-448C-BF9E-426B6ECDE19D}"/>
+                <a16:creationId xmlns:a16="http://schemas.microsoft.com/office/drawing/2014/main" id="{EC799871-5810-4182-A767-80117F8C9F50}"/>
               </a:ext>
             </a:extLst>
           </p:cNvPr>
@@ -3547,14 +3584,24 @@
           <a:bodyPr/>
           <a:lstStyle/>
           <a:p>
-            <a:endParaRPr lang="ru-RU"/>
+            <a:r>
+              <a:rPr lang="ru-RU" b="0" i="0" dirty="0">
+                <a:solidFill>
+                  <a:srgbClr val="222222"/>
+                </a:solidFill>
+                <a:effectLst/>
+                <a:latin typeface="ui-monospace"/>
+              </a:rPr>
+              <a:t>поиск аномальных паттернов в неструктурированных данных из разрозненных источников</a:t>
+            </a:r>
+            <a:endParaRPr lang="ru-RU" dirty="0"/>
           </a:p>
         </p:txBody>
       </p:sp>
     </p:spTree>
     <p:extLst>
       <p:ext uri="{BB962C8B-B14F-4D97-AF65-F5344CB8AC3E}">
-        <p14:creationId xmlns:p14="http://schemas.microsoft.com/office/powerpoint/2010/main" val="3408965315"/>
+        <p14:creationId xmlns:p14="http://schemas.microsoft.com/office/powerpoint/2010/main" val="3021065281"/>
       </p:ext>
     </p:extLst>
   </p:cSld>
